--- a/static/ppts/G8_Sci_Full_Revision.pptx
+++ b/static/ppts/G8_Sci_Full_Revision.pptx
@@ -13,11 +13,9 @@
     <p:sldId id="261" r:id="rId7"/>
     <p:sldId id="262" r:id="rId8"/>
     <p:sldId id="263" r:id="rId9"/>
-    <p:sldId id="264" r:id="rId10"/>
-    <p:sldId id="265" r:id="rId11"/>
   </p:sldIdLst>
   <p:notesMasterIdLst>
-    <p:notesMasterId r:id="rId12"/>
+    <p:notesMasterId r:id="rId10"/>
   </p:notesMasterIdLst>
   <p:sldSz cx="9144000" cy="5143500"/>
   <p:notesSz cx="5143500" cy="9144000"/>
@@ -553,94 +551,6 @@
 </p:notes>
 </file>
 
-<file path=ppt/notesSlides/notesSlide10.xml><?xml version="1.0" encoding="utf-8"?>
-<p:notes xmlns:a="http://schemas.openxmlformats.org/drawingml/2006/main" xmlns:r="http://schemas.openxmlformats.org/officeDocument/2006/relationships" xmlns:p="http://schemas.openxmlformats.org/presentationml/2006/main">
-  <p:cSld>
-    <p:spTree>
-      <p:nvGrpSpPr>
-        <p:cNvPr id="1" name=""/>
-        <p:cNvGrpSpPr/>
-        <p:nvPr/>
-      </p:nvGrpSpPr>
-      <p:grpSpPr>
-        <a:xfrm>
-          <a:off x="0" y="0"/>
-          <a:ext cx="0" cy="0"/>
-          <a:chOff x="0" y="0"/>
-          <a:chExt cx="0" cy="0"/>
-        </a:xfrm>
-      </p:grpSpPr>
-      <p:sp>
-        <p:nvSpPr>
-          <p:cNvPr id="2" name="Slide Image Placeholder 1"/>
-          <p:cNvSpPr>
-            <a:spLocks noGrp="1" noRot="1" noChangeAspect="1"/>
-          </p:cNvSpPr>
-          <p:nvPr>
-            <p:ph type="sldImg"/>
-          </p:nvPr>
-        </p:nvSpPr>
-        <p:spPr/>
-      </p:sp>
-      <p:sp>
-        <p:nvSpPr>
-          <p:cNvPr id="3" name="Notes Placeholder 2"/>
-          <p:cNvSpPr>
-            <a:spLocks noGrp="1"/>
-          </p:cNvSpPr>
-          <p:nvPr>
-            <p:ph type="body" idx="1"/>
-          </p:nvPr>
-        </p:nvSpPr>
-        <p:spPr/>
-        <p:txBody>
-          <a:bodyPr/>
-          <a:lstStyle/>
-          <a:p>
-            <a:r>
-              <a:rPr lang="en-US" dirty="0"/>
-              <a:t/>
-            </a:r>
-            <a:endParaRPr lang="en-US" dirty="0"/>
-          </a:p>
-        </p:txBody>
-      </p:sp>
-      <p:sp>
-        <p:nvSpPr>
-          <p:cNvPr id="4" name="Slide Number Placeholder 3"/>
-          <p:cNvSpPr>
-            <a:spLocks noGrp="1"/>
-          </p:cNvSpPr>
-          <p:nvPr>
-            <p:ph type="sldNum" sz="quarter" idx="10"/>
-          </p:nvPr>
-        </p:nvSpPr>
-        <p:spPr/>
-        <p:txBody>
-          <a:bodyPr/>
-          <a:lstStyle/>
-          <a:p>
-            <a:fld id="{F7021451-1387-4CA6-816F-3879F97B5CBC}" type="slidenum">
-              <a:rPr lang="en-US"/>
-              <a:t>10</a:t>
-            </a:fld>
-            <a:endParaRPr lang="en-US"/>
-          </a:p>
-        </p:txBody>
-      </p:sp>
-    </p:spTree>
-    <p:extLst>
-      <p:ext uri="{BB962C8B-B14F-4D97-AF65-F5344CB8AC3E}">
-        <p14:creationId xmlns:p14="http://schemas.microsoft.com/office/powerpoint/2010/main" val="1024086991"/>
-      </p:ext>
-    </p:extLst>
-  </p:cSld>
-  <p:clrMapOvr>
-    <a:masterClrMapping/>
-  </p:clrMapOvr>
-</p:notes>
-</file>
-
 <file path=ppt/notesSlides/notesSlide2.xml><?xml version="1.0" encoding="utf-8"?>
 <p:notes xmlns:a="http://schemas.openxmlformats.org/drawingml/2006/main" xmlns:r="http://schemas.openxmlformats.org/officeDocument/2006/relationships" xmlns:p="http://schemas.openxmlformats.org/presentationml/2006/main">
   <p:cSld>
@@ -1239,94 +1149,6 @@
             <a:fld id="{F7021451-1387-4CA6-816F-3879F97B5CBC}" type="slidenum">
               <a:rPr lang="en-US"/>
               <a:t>8</a:t>
-            </a:fld>
-            <a:endParaRPr lang="en-US"/>
-          </a:p>
-        </p:txBody>
-      </p:sp>
-    </p:spTree>
-    <p:extLst>
-      <p:ext uri="{BB962C8B-B14F-4D97-AF65-F5344CB8AC3E}">
-        <p14:creationId xmlns:p14="http://schemas.microsoft.com/office/powerpoint/2010/main" val="1024086991"/>
-      </p:ext>
-    </p:extLst>
-  </p:cSld>
-  <p:clrMapOvr>
-    <a:masterClrMapping/>
-  </p:clrMapOvr>
-</p:notes>
-</file>
-
-<file path=ppt/notesSlides/notesSlide9.xml><?xml version="1.0" encoding="utf-8"?>
-<p:notes xmlns:a="http://schemas.openxmlformats.org/drawingml/2006/main" xmlns:r="http://schemas.openxmlformats.org/officeDocument/2006/relationships" xmlns:p="http://schemas.openxmlformats.org/presentationml/2006/main">
-  <p:cSld>
-    <p:spTree>
-      <p:nvGrpSpPr>
-        <p:cNvPr id="1" name=""/>
-        <p:cNvGrpSpPr/>
-        <p:nvPr/>
-      </p:nvGrpSpPr>
-      <p:grpSpPr>
-        <a:xfrm>
-          <a:off x="0" y="0"/>
-          <a:ext cx="0" cy="0"/>
-          <a:chOff x="0" y="0"/>
-          <a:chExt cx="0" cy="0"/>
-        </a:xfrm>
-      </p:grpSpPr>
-      <p:sp>
-        <p:nvSpPr>
-          <p:cNvPr id="2" name="Slide Image Placeholder 1"/>
-          <p:cNvSpPr>
-            <a:spLocks noGrp="1" noRot="1" noChangeAspect="1"/>
-          </p:cNvSpPr>
-          <p:nvPr>
-            <p:ph type="sldImg"/>
-          </p:nvPr>
-        </p:nvSpPr>
-        <p:spPr/>
-      </p:sp>
-      <p:sp>
-        <p:nvSpPr>
-          <p:cNvPr id="3" name="Notes Placeholder 2"/>
-          <p:cNvSpPr>
-            <a:spLocks noGrp="1"/>
-          </p:cNvSpPr>
-          <p:nvPr>
-            <p:ph type="body" idx="1"/>
-          </p:nvPr>
-        </p:nvSpPr>
-        <p:spPr/>
-        <p:txBody>
-          <a:bodyPr/>
-          <a:lstStyle/>
-          <a:p>
-            <a:r>
-              <a:rPr lang="en-US" dirty="0"/>
-              <a:t/>
-            </a:r>
-            <a:endParaRPr lang="en-US" dirty="0"/>
-          </a:p>
-        </p:txBody>
-      </p:sp>
-      <p:sp>
-        <p:nvSpPr>
-          <p:cNvPr id="4" name="Slide Number Placeholder 3"/>
-          <p:cNvSpPr>
-            <a:spLocks noGrp="1"/>
-          </p:cNvSpPr>
-          <p:nvPr>
-            <p:ph type="sldNum" sz="quarter" idx="10"/>
-          </p:nvPr>
-        </p:nvSpPr>
-        <p:spPr/>
-        <p:txBody>
-          <a:bodyPr/>
-          <a:lstStyle/>
-          <a:p>
-            <a:fld id="{F7021451-1387-4CA6-816F-3879F97B5CBC}" type="slidenum">
-              <a:rPr lang="en-US"/>
-              <a:t>9</a:t>
             </a:fld>
             <a:endParaRPr lang="en-US"/>
           </a:p>
@@ -1704,7 +1526,7 @@
             <a:avLst/>
           </a:prstGeom>
           <a:solidFill>
-            <a:srgbClr val="1B2A4A"/>
+            <a:srgbClr val="E9C46A"/>
           </a:solidFill>
           <a:ln/>
         </p:spPr>
@@ -1736,7 +1558,7 @@
             <a:r>
               <a:rPr lang="en-US" sz="1400" b="1" spc="400" kern="0" dirty="0">
                 <a:solidFill>
-                  <a:srgbClr val="1B2A4A"/>
+                  <a:srgbClr val="E9C46A"/>
                 </a:solidFill>
                 <a:latin typeface="Calibri" pitchFamily="34" charset="0"/>
                 <a:ea typeface="Calibri" pitchFamily="34" charset="-122"/>
@@ -1781,38 +1603,55 @@
                 <a:ea typeface="Georgia" pitchFamily="34" charset="-122"/>
                 <a:cs typeface="Georgia" pitchFamily="34" charset="-120"/>
               </a:rPr>
-              <a:t>Ecology Revision</a:t>
+              <a:t>Ecology</a:t>
             </a:r>
             <a:endParaRPr lang="en-US" sz="4000" dirty="0"/>
           </a:p>
-        </p:txBody>
-      </p:sp>
-      <p:sp>
-        <p:nvSpPr>
-          <p:cNvPr id="6" name="Text 4"/>
-          <p:cNvSpPr/>
-          <p:nvPr/>
-        </p:nvSpPr>
-        <p:spPr>
-          <a:xfrm>
-            <a:off x="731520" y="3200400"/>
-            <a:ext cx="7680960" cy="548640"/>
-          </a:xfrm>
-          <a:prstGeom prst="rect">
-            <a:avLst/>
-          </a:prstGeom>
-          <a:noFill/>
-          <a:ln/>
-        </p:spPr>
-        <p:txBody>
-          <a:bodyPr wrap="square" rtlCol="0" anchor="ctr"/>
-          <a:lstStyle/>
           <a:p>
             <a:pPr indent="0" marL="0">
               <a:buNone/>
             </a:pPr>
             <a:r>
-              <a:rPr lang="en-US" sz="1600" dirty="0">
+              <a:rPr lang="en-US" sz="4000" b="1" dirty="0">
+                <a:solidFill>
+                  <a:srgbClr val="FFFFFF"/>
+                </a:solidFill>
+                <a:latin typeface="Georgia" pitchFamily="34" charset="0"/>
+                <a:ea typeface="Georgia" pitchFamily="34" charset="-122"/>
+                <a:cs typeface="Georgia" pitchFamily="34" charset="-120"/>
+              </a:rPr>
+              <a:t>Full Revision</a:t>
+            </a:r>
+            <a:endParaRPr lang="en-US" sz="4000" dirty="0"/>
+          </a:p>
+        </p:txBody>
+      </p:sp>
+      <p:sp>
+        <p:nvSpPr>
+          <p:cNvPr id="6" name="Text 4"/>
+          <p:cNvSpPr/>
+          <p:nvPr/>
+        </p:nvSpPr>
+        <p:spPr>
+          <a:xfrm>
+            <a:off x="731520" y="3200400"/>
+            <a:ext cx="7680960" cy="548640"/>
+          </a:xfrm>
+          <a:prstGeom prst="rect">
+            <a:avLst/>
+          </a:prstGeom>
+          <a:noFill/>
+          <a:ln/>
+        </p:spPr>
+        <p:txBody>
+          <a:bodyPr wrap="square" rtlCol="0" anchor="ctr"/>
+          <a:lstStyle/>
+          <a:p>
+            <a:pPr indent="0" marL="0">
+              <a:buNone/>
+            </a:pPr>
+            <a:r>
+              <a:rPr lang="en-US" sz="1600" i="1" dirty="0">
                 <a:solidFill>
                   <a:srgbClr val="9B9690"/>
                 </a:solidFill>
@@ -1820,7 +1659,7 @@
                 <a:ea typeface="Calibri" pitchFamily="34" charset="-122"/>
                 <a:cs typeface="Calibri" pitchFamily="34" charset="-120"/>
               </a:rPr>
-              <a:t>Ecosystems, food webs, energy, interdependence, human impact</a:t>
+              <a:t>Everything you need to know</a:t>
             </a:r>
             <a:endParaRPr lang="en-US" sz="1600" dirty="0"/>
           </a:p>
@@ -1851,7 +1690,7 @@
               <a:buNone/>
             </a:pPr>
             <a:r>
-              <a:rPr lang="en-US" sz="1100" dirty="0">
+              <a:rPr lang="en-US" sz="1200" dirty="0">
                 <a:solidFill>
                   <a:srgbClr val="6B6660"/>
                 </a:solidFill>
@@ -1859,191 +1698,9 @@
                 <a:ea typeface="Calibri" pitchFamily="34" charset="-122"/>
                 <a:cs typeface="Calibri" pitchFamily="34" charset="-120"/>
               </a:rPr>
-              <a:t>Mr Zocchi · NIS</a:t>
-            </a:r>
-            <a:endParaRPr lang="en-US" sz="1100" dirty="0"/>
-          </a:p>
-        </p:txBody>
-      </p:sp>
-    </p:spTree>
-  </p:cSld>
-  <p:clrMapOvr>
-    <a:masterClrMapping/>
-  </p:clrMapOvr>
-</p:sld>
-</file>
-
-<file path=ppt/slides/slide10.xml><?xml version="1.0" encoding="utf-8"?>
-<p:sld xmlns:a="http://schemas.openxmlformats.org/drawingml/2006/main" xmlns:r="http://schemas.openxmlformats.org/officeDocument/2006/relationships" xmlns:p="http://schemas.openxmlformats.org/presentationml/2006/main">
-  <p:cSld name="Slide 10">
-    <p:spTree>
-      <p:nvGrpSpPr>
-        <p:cNvPr id="1" name=""/>
-        <p:cNvGrpSpPr/>
-        <p:nvPr/>
-      </p:nvGrpSpPr>
-      <p:grpSpPr>
-        <a:xfrm>
-          <a:off x="0" y="0"/>
-          <a:ext cx="0" cy="0"/>
-          <a:chOff x="0" y="0"/>
-          <a:chExt cx="0" cy="0"/>
-        </a:xfrm>
-      </p:grpSpPr>
-      <p:sp>
-        <p:nvSpPr>
-          <p:cNvPr id="2" name="Shape 0"/>
-          <p:cNvSpPr/>
-          <p:nvPr/>
-        </p:nvSpPr>
-        <p:spPr>
-          <a:xfrm>
-            <a:off x="0" y="0"/>
-            <a:ext cx="9144000" cy="5143500"/>
-          </a:xfrm>
-          <a:prstGeom prst="rect">
-            <a:avLst/>
-          </a:prstGeom>
-          <a:solidFill>
-            <a:srgbClr val="1B2A4A"/>
-          </a:solidFill>
-          <a:ln/>
-        </p:spPr>
-      </p:sp>
-      <p:sp>
-        <p:nvSpPr>
-          <p:cNvPr id="3" name="Shape 1"/>
-          <p:cNvSpPr/>
-          <p:nvPr/>
-        </p:nvSpPr>
-        <p:spPr>
-          <a:xfrm>
-            <a:off x="0" y="4777740"/>
-            <a:ext cx="9144000" cy="365760"/>
-          </a:xfrm>
-          <a:prstGeom prst="rect">
-            <a:avLst/>
-          </a:prstGeom>
-          <a:solidFill>
-            <a:srgbClr val="1B2A4A"/>
-          </a:solidFill>
-          <a:ln/>
-        </p:spPr>
-      </p:sp>
-      <p:sp>
-        <p:nvSpPr>
-          <p:cNvPr id="4" name="Text 2"/>
-          <p:cNvSpPr/>
-          <p:nvPr/>
-        </p:nvSpPr>
-        <p:spPr>
-          <a:xfrm>
-            <a:off x="731520" y="1371600"/>
-            <a:ext cx="7680960" cy="914400"/>
-          </a:xfrm>
-          <a:prstGeom prst="rect">
-            <a:avLst/>
-          </a:prstGeom>
-          <a:noFill/>
-          <a:ln/>
-        </p:spPr>
-        <p:txBody>
-          <a:bodyPr wrap="square" rtlCol="0" anchor="ctr"/>
-          <a:lstStyle/>
-          <a:p>
-            <a:pPr algn="ctr" indent="0" marL="0">
-              <a:buNone/>
-            </a:pPr>
-            <a:r>
-              <a:rPr lang="en-US" sz="3600" b="1" dirty="0">
-                <a:solidFill>
-                  <a:srgbClr val="FFFFFF"/>
-                </a:solidFill>
-                <a:latin typeface="Georgia" pitchFamily="34" charset="0"/>
-                <a:ea typeface="Georgia" pitchFamily="34" charset="-122"/>
-                <a:cs typeface="Georgia" pitchFamily="34" charset="-120"/>
-              </a:rPr>
-              <a:t>Review &amp; Practise</a:t>
-            </a:r>
-            <a:endParaRPr lang="en-US" sz="3600" dirty="0"/>
-          </a:p>
-        </p:txBody>
-      </p:sp>
-      <p:sp>
-        <p:nvSpPr>
-          <p:cNvPr id="5" name="Text 3"/>
-          <p:cNvSpPr/>
-          <p:nvPr/>
-        </p:nvSpPr>
-        <p:spPr>
-          <a:xfrm>
-            <a:off x="731520" y="2468880"/>
-            <a:ext cx="7680960" cy="548640"/>
-          </a:xfrm>
-          <a:prstGeom prst="rect">
-            <a:avLst/>
-          </a:prstGeom>
-          <a:noFill/>
-          <a:ln/>
-        </p:spPr>
-        <p:txBody>
-          <a:bodyPr wrap="square" rtlCol="0" anchor="ctr"/>
-          <a:lstStyle/>
-          <a:p>
-            <a:pPr algn="ctr" indent="0" marL="0">
-              <a:buNone/>
-            </a:pPr>
-            <a:r>
-              <a:rPr lang="en-US" sz="1800" dirty="0">
-                <a:solidFill>
-                  <a:srgbClr val="1B2A4A"/>
-                </a:solidFill>
-                <a:latin typeface="Calibri" pitchFamily="34" charset="0"/>
-                <a:ea typeface="Calibri" pitchFamily="34" charset="-122"/>
-                <a:cs typeface="Calibri" pitchFamily="34" charset="-120"/>
-              </a:rPr>
-              <a:t>learnlattice.org/students/exam-revision</a:t>
-            </a:r>
-            <a:endParaRPr lang="en-US" sz="1800" dirty="0"/>
-          </a:p>
-        </p:txBody>
-      </p:sp>
-      <p:sp>
-        <p:nvSpPr>
-          <p:cNvPr id="6" name="Text 4"/>
-          <p:cNvSpPr/>
-          <p:nvPr/>
-        </p:nvSpPr>
-        <p:spPr>
-          <a:xfrm>
-            <a:off x="731520" y="3200400"/>
-            <a:ext cx="7680960" cy="457200"/>
-          </a:xfrm>
-          <a:prstGeom prst="rect">
-            <a:avLst/>
-          </a:prstGeom>
-          <a:noFill/>
-          <a:ln/>
-        </p:spPr>
-        <p:txBody>
-          <a:bodyPr wrap="square" rtlCol="0" anchor="ctr"/>
-          <a:lstStyle/>
-          <a:p>
-            <a:pPr algn="ctr" indent="0" marL="0">
-              <a:buNone/>
-            </a:pPr>
-            <a:r>
-              <a:rPr lang="en-US" sz="1400" dirty="0">
-                <a:solidFill>
-                  <a:srgbClr val="9B9690"/>
-                </a:solidFill>
-                <a:latin typeface="Calibri" pitchFamily="34" charset="0"/>
-                <a:ea typeface="Calibri" pitchFamily="34" charset="-122"/>
-                <a:cs typeface="Calibri" pitchFamily="34" charset="-120"/>
-              </a:rPr>
-              <a:t>mrzocchi.com</a:t>
-            </a:r>
-            <a:endParaRPr lang="en-US" sz="1400" dirty="0"/>
+              <a:t>Mr Zocchi</a:t>
+            </a:r>
+            <a:endParaRPr lang="en-US" sz="1200" dirty="0"/>
           </a:p>
         </p:txBody>
       </p:sp>
@@ -2101,7 +1758,7 @@
         <p:spPr>
           <a:xfrm>
             <a:off x="731520" y="914400"/>
-            <a:ext cx="2743200" cy="1371600"/>
+            <a:ext cx="1828800" cy="1097280"/>
           </a:xfrm>
           <a:prstGeom prst="rect">
             <a:avLst/>
@@ -2119,7 +1776,7 @@
             <a:r>
               <a:rPr lang="en-US" sz="7200" b="1" dirty="0">
                 <a:solidFill>
-                  <a:srgbClr val="1B2A4A">
+                  <a:srgbClr val="E9C46A">
                     <a:alpha val="70000"/>
                   </a:srgbClr>
                 </a:solidFill>
@@ -2141,7 +1798,7 @@
         </p:nvSpPr>
         <p:spPr>
           <a:xfrm>
-            <a:off x="731520" y="2286000"/>
+            <a:off x="731520" y="2011680"/>
             <a:ext cx="7680960" cy="1097280"/>
           </a:xfrm>
           <a:prstGeom prst="rect">
@@ -2158,7 +1815,7 @@
               <a:buNone/>
             </a:pPr>
             <a:r>
-              <a:rPr lang="en-US" sz="3600" b="1" dirty="0">
+              <a:rPr lang="en-US" sz="3200" b="1" dirty="0">
                 <a:solidFill>
                   <a:srgbClr val="FFFFFF"/>
                 </a:solidFill>
@@ -2168,9 +1825,29 @@
               </a:rPr>
               <a:t>Ecosystems</a:t>
             </a:r>
-            <a:endParaRPr lang="en-US" sz="3600" dirty="0"/>
-          </a:p>
-        </p:txBody>
+            <a:endParaRPr lang="en-US" sz="3200" dirty="0"/>
+          </a:p>
+        </p:txBody>
+      </p:sp>
+      <p:sp>
+        <p:nvSpPr>
+          <p:cNvPr id="5" name="Shape 3"/>
+          <p:cNvSpPr/>
+          <p:nvPr/>
+        </p:nvSpPr>
+        <p:spPr>
+          <a:xfrm>
+            <a:off x="731520" y="3200400"/>
+            <a:ext cx="1828800" cy="54864"/>
+          </a:xfrm>
+          <a:prstGeom prst="rect">
+            <a:avLst/>
+          </a:prstGeom>
+          <a:solidFill>
+            <a:srgbClr val="E9C46A"/>
+          </a:solidFill>
+          <a:ln/>
+        </p:spPr>
       </p:sp>
     </p:spTree>
   </p:cSld>
@@ -2183,6 +1860,13 @@
 <file path=ppt/slides/slide3.xml><?xml version="1.0" encoding="utf-8"?>
 <p:sld xmlns:a="http://schemas.openxmlformats.org/drawingml/2006/main" xmlns:r="http://schemas.openxmlformats.org/officeDocument/2006/relationships" xmlns:p="http://schemas.openxmlformats.org/presentationml/2006/main">
   <p:cSld name="Slide 3">
+    <p:bg>
+      <p:bgPr>
+        <a:solidFill>
+          <a:srgbClr val="FAF8F5"/>
+        </a:solidFill>
+      </p:bgPr>
+    </p:bg>
     <p:spTree>
       <p:nvGrpSpPr>
         <p:cNvPr id="1" name=""/>
@@ -2206,13 +1890,13 @@
         <p:spPr>
           <a:xfrm>
             <a:off x="0" y="0"/>
-            <a:ext cx="9144000" cy="5143500"/>
-          </a:xfrm>
-          <a:prstGeom prst="rect">
-            <a:avLst/>
-          </a:prstGeom>
-          <a:solidFill>
-            <a:srgbClr val="FAF8F5"/>
+            <a:ext cx="9144000" cy="822960"/>
+          </a:xfrm>
+          <a:prstGeom prst="rect">
+            <a:avLst/>
+          </a:prstGeom>
+          <a:solidFill>
+            <a:srgbClr val="FFFFFF"/>
           </a:solidFill>
           <a:ln/>
         </p:spPr>
@@ -2225,14 +1909,14 @@
         </p:nvSpPr>
         <p:spPr>
           <a:xfrm>
-            <a:off x="0" y="0"/>
-            <a:ext cx="9144000" cy="54864"/>
-          </a:xfrm>
-          <a:prstGeom prst="rect">
-            <a:avLst/>
-          </a:prstGeom>
-          <a:solidFill>
-            <a:srgbClr val="1B2A4A"/>
+            <a:off x="0" y="795528"/>
+            <a:ext cx="9144000" cy="27432"/>
+          </a:xfrm>
+          <a:prstGeom prst="rect">
+            <a:avLst/>
+          </a:prstGeom>
+          <a:solidFill>
+            <a:srgbClr val="E9C46A"/>
           </a:solidFill>
           <a:ln/>
         </p:spPr>
@@ -2245,7 +1929,7 @@
         </p:nvSpPr>
         <p:spPr>
           <a:xfrm>
-            <a:off x="640080" y="320040"/>
+            <a:off x="640080" y="91440"/>
             <a:ext cx="7863840" cy="640080"/>
           </a:xfrm>
           <a:prstGeom prst="rect">
@@ -2262,7 +1946,7 @@
               <a:buNone/>
             </a:pPr>
             <a:r>
-              <a:rPr lang="en-US" sz="2600" b="1" dirty="0">
+              <a:rPr lang="en-US" sz="2200" b="1" dirty="0">
                 <a:solidFill>
                   <a:srgbClr val="1B2A4A"/>
                 </a:solidFill>
@@ -2270,9 +1954,9 @@
                 <a:ea typeface="Georgia" pitchFamily="34" charset="-122"/>
                 <a:cs typeface="Georgia" pitchFamily="34" charset="-120"/>
               </a:rPr>
-              <a:t>Ecosystems</a:t>
-            </a:r>
-            <a:endParaRPr lang="en-US" sz="2600" dirty="0"/>
+              <a:t>Ecosystems Recap</a:t>
+            </a:r>
+            <a:endParaRPr lang="en-US" sz="2200" dirty="0"/>
           </a:p>
         </p:txBody>
       </p:sp>
@@ -2284,8 +1968,8 @@
         </p:nvSpPr>
         <p:spPr>
           <a:xfrm>
-            <a:off x="640080" y="1188720"/>
-            <a:ext cx="7863840" cy="3200400"/>
+            <a:off x="640080" y="1005840"/>
+            <a:ext cx="7863840" cy="2926080"/>
           </a:xfrm>
           <a:prstGeom prst="rect">
             <a:avLst/>
@@ -2294,18 +1978,18 @@
           <a:ln/>
         </p:spPr>
         <p:txBody>
-          <a:bodyPr wrap="square" rtlCol="0" anchor="t"/>
+          <a:bodyPr wrap="square" rtlCol="0" anchor="ctr"/>
           <a:lstStyle/>
           <a:p>
             <a:pPr marL="342900" indent="-342900">
-              <a:lnSpc>
-                <a:spcPct val="140000"/>
-              </a:lnSpc>
+              <a:spcAft>
+                <a:spcPts val="800"/>
+              </a:spcAft>
               <a:buSzPct val="100000"/>
               <a:buChar char="•"/>
             </a:pPr>
             <a:r>
-              <a:rPr lang="en-US" sz="1500" dirty="0">
+              <a:rPr lang="en-US" sz="1600" dirty="0">
                 <a:solidFill>
                   <a:srgbClr val="3D3A36"/>
                 </a:solidFill>
@@ -2313,20 +1997,20 @@
                 <a:ea typeface="Calibri" pitchFamily="34" charset="-122"/>
                 <a:cs typeface="Calibri" pitchFamily="34" charset="-120"/>
               </a:rPr>
-              <a:t>Ecosystem = living organisms + non-living environment.</a:t>
-            </a:r>
-            <a:endParaRPr lang="en-US" sz="1500" dirty="0"/>
+              <a:t>Ecosystem = biotic + abiotic factors interacting.</a:t>
+            </a:r>
+            <a:endParaRPr lang="en-US" sz="1600" dirty="0"/>
           </a:p>
           <a:p>
             <a:pPr marL="342900" indent="-342900">
-              <a:lnSpc>
-                <a:spcPct val="140000"/>
-              </a:lnSpc>
+              <a:spcAft>
+                <a:spcPts val="800"/>
+              </a:spcAft>
               <a:buSzPct val="100000"/>
               <a:buChar char="•"/>
             </a:pPr>
             <a:r>
-              <a:rPr lang="en-US" sz="1500" dirty="0">
+              <a:rPr lang="en-US" sz="1600" dirty="0">
                 <a:solidFill>
                   <a:srgbClr val="3D3A36"/>
                 </a:solidFill>
@@ -2334,20 +2018,20 @@
                 <a:ea typeface="Calibri" pitchFamily="34" charset="-122"/>
                 <a:cs typeface="Calibri" pitchFamily="34" charset="-120"/>
               </a:rPr>
-              <a:t>Biotic (living) vs Abiotic (non-living).</a:t>
-            </a:r>
-            <a:endParaRPr lang="en-US" sz="1500" dirty="0"/>
+              <a:t>Individual → Population → Community → Ecosystem → Biome → Biosphere.</a:t>
+            </a:r>
+            <a:endParaRPr lang="en-US" sz="1600" dirty="0"/>
           </a:p>
           <a:p>
             <a:pPr marL="342900" indent="-342900">
-              <a:lnSpc>
-                <a:spcPct val="140000"/>
-              </a:lnSpc>
+              <a:spcAft>
+                <a:spcPts val="800"/>
+              </a:spcAft>
               <a:buSzPct val="100000"/>
               <a:buChar char="•"/>
             </a:pPr>
             <a:r>
-              <a:rPr lang="en-US" sz="1500" dirty="0">
+              <a:rPr lang="en-US" sz="1600" dirty="0">
                 <a:solidFill>
                   <a:srgbClr val="3D3A36"/>
                 </a:solidFill>
@@ -2355,9 +2039,9 @@
                 <a:ea typeface="Calibri" pitchFamily="34" charset="-122"/>
                 <a:cs typeface="Calibri" pitchFamily="34" charset="-120"/>
               </a:rPr>
-              <a:t>Habitat = where it lives. Niche = its role.</a:t>
-            </a:r>
-            <a:endParaRPr lang="en-US" sz="1500" dirty="0"/>
+              <a:t>Xuanwu Lake, Korean DMZ, Black Forest — all ecosystems.</a:t>
+            </a:r>
+            <a:endParaRPr lang="en-US" sz="1600" dirty="0"/>
           </a:p>
         </p:txBody>
       </p:sp>
@@ -2415,7 +2099,7 @@
         <p:spPr>
           <a:xfrm>
             <a:off x="731520" y="914400"/>
-            <a:ext cx="2743200" cy="1371600"/>
+            <a:ext cx="1828800" cy="1097280"/>
           </a:xfrm>
           <a:prstGeom prst="rect">
             <a:avLst/>
@@ -2433,7 +2117,7 @@
             <a:r>
               <a:rPr lang="en-US" sz="7200" b="1" dirty="0">
                 <a:solidFill>
-                  <a:srgbClr val="1B2A4A">
+                  <a:srgbClr val="E9C46A">
                     <a:alpha val="70000"/>
                   </a:srgbClr>
                 </a:solidFill>
@@ -2455,7 +2139,7 @@
         </p:nvSpPr>
         <p:spPr>
           <a:xfrm>
-            <a:off x="731520" y="2286000"/>
+            <a:off x="731520" y="2011680"/>
             <a:ext cx="7680960" cy="1097280"/>
           </a:xfrm>
           <a:prstGeom prst="rect">
@@ -2472,7 +2156,7 @@
               <a:buNone/>
             </a:pPr>
             <a:r>
-              <a:rPr lang="en-US" sz="3600" b="1" dirty="0">
+              <a:rPr lang="en-US" sz="3200" b="1" dirty="0">
                 <a:solidFill>
                   <a:srgbClr val="FFFFFF"/>
                 </a:solidFill>
@@ -2480,11 +2164,31 @@
                 <a:ea typeface="Georgia" pitchFamily="34" charset="-122"/>
                 <a:cs typeface="Georgia" pitchFamily="34" charset="-120"/>
               </a:rPr>
-              <a:t>Food Chains &amp; Energy</a:t>
-            </a:r>
-            <a:endParaRPr lang="en-US" sz="3600" dirty="0"/>
-          </a:p>
-        </p:txBody>
+              <a:t>Feeding &amp; Energy</a:t>
+            </a:r>
+            <a:endParaRPr lang="en-US" sz="3200" dirty="0"/>
+          </a:p>
+        </p:txBody>
+      </p:sp>
+      <p:sp>
+        <p:nvSpPr>
+          <p:cNvPr id="5" name="Shape 3"/>
+          <p:cNvSpPr/>
+          <p:nvPr/>
+        </p:nvSpPr>
+        <p:spPr>
+          <a:xfrm>
+            <a:off x="731520" y="3200400"/>
+            <a:ext cx="1828800" cy="54864"/>
+          </a:xfrm>
+          <a:prstGeom prst="rect">
+            <a:avLst/>
+          </a:prstGeom>
+          <a:solidFill>
+            <a:srgbClr val="E9C46A"/>
+          </a:solidFill>
+          <a:ln/>
+        </p:spPr>
       </p:sp>
     </p:spTree>
   </p:cSld>
@@ -2497,6 +2201,13 @@
 <file path=ppt/slides/slide5.xml><?xml version="1.0" encoding="utf-8"?>
 <p:sld xmlns:a="http://schemas.openxmlformats.org/drawingml/2006/main" xmlns:r="http://schemas.openxmlformats.org/officeDocument/2006/relationships" xmlns:p="http://schemas.openxmlformats.org/presentationml/2006/main">
   <p:cSld name="Slide 5">
+    <p:bg>
+      <p:bgPr>
+        <a:solidFill>
+          <a:srgbClr val="FAF8F5"/>
+        </a:solidFill>
+      </p:bgPr>
+    </p:bg>
     <p:spTree>
       <p:nvGrpSpPr>
         <p:cNvPr id="1" name=""/>
@@ -2520,13 +2231,13 @@
         <p:spPr>
           <a:xfrm>
             <a:off x="0" y="0"/>
-            <a:ext cx="9144000" cy="5143500"/>
-          </a:xfrm>
-          <a:prstGeom prst="rect">
-            <a:avLst/>
-          </a:prstGeom>
-          <a:solidFill>
-            <a:srgbClr val="FAF8F5"/>
+            <a:ext cx="9144000" cy="822960"/>
+          </a:xfrm>
+          <a:prstGeom prst="rect">
+            <a:avLst/>
+          </a:prstGeom>
+          <a:solidFill>
+            <a:srgbClr val="FFFFFF"/>
           </a:solidFill>
           <a:ln/>
         </p:spPr>
@@ -2539,14 +2250,14 @@
         </p:nvSpPr>
         <p:spPr>
           <a:xfrm>
-            <a:off x="0" y="0"/>
-            <a:ext cx="9144000" cy="54864"/>
-          </a:xfrm>
-          <a:prstGeom prst="rect">
-            <a:avLst/>
-          </a:prstGeom>
-          <a:solidFill>
-            <a:srgbClr val="1B2A4A"/>
+            <a:off x="0" y="795528"/>
+            <a:ext cx="9144000" cy="27432"/>
+          </a:xfrm>
+          <a:prstGeom prst="rect">
+            <a:avLst/>
+          </a:prstGeom>
+          <a:solidFill>
+            <a:srgbClr val="E9C46A"/>
           </a:solidFill>
           <a:ln/>
         </p:spPr>
@@ -2559,7 +2270,7 @@
         </p:nvSpPr>
         <p:spPr>
           <a:xfrm>
-            <a:off x="640080" y="320040"/>
+            <a:off x="640080" y="91440"/>
             <a:ext cx="7863840" cy="640080"/>
           </a:xfrm>
           <a:prstGeom prst="rect">
@@ -2576,7 +2287,7 @@
               <a:buNone/>
             </a:pPr>
             <a:r>
-              <a:rPr lang="en-US" sz="2600" b="1" dirty="0">
+              <a:rPr lang="en-US" sz="2200" b="1" dirty="0">
                 <a:solidFill>
                   <a:srgbClr val="1B2A4A"/>
                 </a:solidFill>
@@ -2584,9 +2295,9 @@
                 <a:ea typeface="Georgia" pitchFamily="34" charset="-122"/>
                 <a:cs typeface="Georgia" pitchFamily="34" charset="-120"/>
               </a:rPr>
-              <a:t>Energy Flow</a:t>
-            </a:r>
-            <a:endParaRPr lang="en-US" sz="2600" dirty="0"/>
+              <a:t>Feeding &amp; Energy Recap</a:t>
+            </a:r>
+            <a:endParaRPr lang="en-US" sz="2200" dirty="0"/>
           </a:p>
         </p:txBody>
       </p:sp>
@@ -2598,8 +2309,8 @@
         </p:nvSpPr>
         <p:spPr>
           <a:xfrm>
-            <a:off x="640080" y="1188720"/>
-            <a:ext cx="7863840" cy="3200400"/>
+            <a:off x="640080" y="1005840"/>
+            <a:ext cx="7863840" cy="2926080"/>
           </a:xfrm>
           <a:prstGeom prst="rect">
             <a:avLst/>
@@ -2608,18 +2319,18 @@
           <a:ln/>
         </p:spPr>
         <p:txBody>
-          <a:bodyPr wrap="square" rtlCol="0" anchor="t"/>
+          <a:bodyPr wrap="square" rtlCol="0" anchor="ctr"/>
           <a:lstStyle/>
           <a:p>
             <a:pPr marL="342900" indent="-342900">
-              <a:lnSpc>
-                <a:spcPct val="140000"/>
-              </a:lnSpc>
+              <a:spcAft>
+                <a:spcPts val="800"/>
+              </a:spcAft>
               <a:buSzPct val="100000"/>
               <a:buChar char="•"/>
             </a:pPr>
             <a:r>
-              <a:rPr lang="en-US" sz="1500" dirty="0">
+              <a:rPr lang="en-US" sz="1600" dirty="0">
                 <a:solidFill>
                   <a:srgbClr val="3D3A36"/>
                 </a:solidFill>
@@ -2629,18 +2340,18 @@
               </a:rPr>
               <a:t>Producer → Primary → Secondary → Tertiary consumer.</a:t>
             </a:r>
-            <a:endParaRPr lang="en-US" sz="1500" dirty="0"/>
+            <a:endParaRPr lang="en-US" sz="1600" dirty="0"/>
           </a:p>
           <a:p>
             <a:pPr marL="342900" indent="-342900">
-              <a:lnSpc>
-                <a:spcPct val="140000"/>
-              </a:lnSpc>
+              <a:spcAft>
+                <a:spcPts val="800"/>
+              </a:spcAft>
               <a:buSzPct val="100000"/>
               <a:buChar char="•"/>
             </a:pPr>
             <a:r>
-              <a:rPr lang="en-US" sz="1500" dirty="0">
+              <a:rPr lang="en-US" sz="1600" dirty="0">
                 <a:solidFill>
                   <a:srgbClr val="3D3A36"/>
                 </a:solidFill>
@@ -2648,20 +2359,20 @@
                 <a:ea typeface="Calibri" pitchFamily="34" charset="-122"/>
                 <a:cs typeface="Calibri" pitchFamily="34" charset="-120"/>
               </a:rPr>
-              <a:t>Arrows = direction of energy flow.</a:t>
-            </a:r>
-            <a:endParaRPr lang="en-US" sz="1500" dirty="0"/>
+              <a:t>Only ~10% of energy transfers per level.</a:t>
+            </a:r>
+            <a:endParaRPr lang="en-US" sz="1600" dirty="0"/>
           </a:p>
           <a:p>
             <a:pPr marL="342900" indent="-342900">
-              <a:lnSpc>
-                <a:spcPct val="140000"/>
-              </a:lnSpc>
+              <a:spcAft>
+                <a:spcPts val="800"/>
+              </a:spcAft>
               <a:buSzPct val="100000"/>
               <a:buChar char="•"/>
             </a:pPr>
             <a:r>
-              <a:rPr lang="en-US" sz="1500" dirty="0">
+              <a:rPr lang="en-US" sz="1600" dirty="0">
                 <a:solidFill>
                   <a:srgbClr val="3D3A36"/>
                 </a:solidFill>
@@ -2669,20 +2380,20 @@
                 <a:ea typeface="Calibri" pitchFamily="34" charset="-122"/>
                 <a:cs typeface="Calibri" pitchFamily="34" charset="-120"/>
               </a:rPr>
-              <a:t>10% rule: only 10% passes to next level.</a:t>
-            </a:r>
-            <a:endParaRPr lang="en-US" sz="1500" dirty="0"/>
+              <a:t>Rest lost as heat, waste, movement.</a:t>
+            </a:r>
+            <a:endParaRPr lang="en-US" sz="1600" dirty="0"/>
           </a:p>
           <a:p>
             <a:pPr marL="342900" indent="-342900">
-              <a:lnSpc>
-                <a:spcPct val="140000"/>
-              </a:lnSpc>
+              <a:spcAft>
+                <a:spcPts val="800"/>
+              </a:spcAft>
               <a:buSzPct val="100000"/>
               <a:buChar char="•"/>
             </a:pPr>
             <a:r>
-              <a:rPr lang="en-US" sz="1500" dirty="0">
+              <a:rPr lang="en-US" sz="1600" dirty="0">
                 <a:solidFill>
                   <a:srgbClr val="3D3A36"/>
                 </a:solidFill>
@@ -2690,30 +2401,9 @@
                 <a:ea typeface="Calibri" pitchFamily="34" charset="-122"/>
                 <a:cs typeface="Calibri" pitchFamily="34" charset="-120"/>
               </a:rPr>
-              <a:t>90% lost as heat through respiration.</a:t>
-            </a:r>
-            <a:endParaRPr lang="en-US" sz="1500" dirty="0"/>
-          </a:p>
-          <a:p>
-            <a:pPr marL="342900" indent="-342900">
-              <a:lnSpc>
-                <a:spcPct val="140000"/>
-              </a:lnSpc>
-              <a:buSzPct val="100000"/>
-              <a:buChar char="•"/>
-            </a:pPr>
-            <a:r>
-              <a:rPr lang="en-US" sz="1500" dirty="0">
-                <a:solidFill>
-                  <a:srgbClr val="3D3A36"/>
-                </a:solidFill>
-                <a:latin typeface="Calibri" pitchFamily="34" charset="0"/>
-                <a:ea typeface="Calibri" pitchFamily="34" charset="-122"/>
-                <a:cs typeface="Calibri" pitchFamily="34" charset="-120"/>
-              </a:rPr>
-              <a:t>Max 4–5 trophic levels.</a:t>
-            </a:r>
-            <a:endParaRPr lang="en-US" sz="1500" dirty="0"/>
+              <a:t>Food webs show interconnected relationships.</a:t>
+            </a:r>
+            <a:endParaRPr lang="en-US" sz="1600" dirty="0"/>
           </a:p>
         </p:txBody>
       </p:sp>
@@ -2771,7 +2461,7 @@
         <p:spPr>
           <a:xfrm>
             <a:off x="731520" y="914400"/>
-            <a:ext cx="2743200" cy="1371600"/>
+            <a:ext cx="1828800" cy="1097280"/>
           </a:xfrm>
           <a:prstGeom prst="rect">
             <a:avLst/>
@@ -2789,7 +2479,7 @@
             <a:r>
               <a:rPr lang="en-US" sz="7200" b="1" dirty="0">
                 <a:solidFill>
-                  <a:srgbClr val="1B2A4A">
+                  <a:srgbClr val="E9C46A">
                     <a:alpha val="70000"/>
                   </a:srgbClr>
                 </a:solidFill>
@@ -2811,7 +2501,7 @@
         </p:nvSpPr>
         <p:spPr>
           <a:xfrm>
-            <a:off x="731520" y="2286000"/>
+            <a:off x="731520" y="2011680"/>
             <a:ext cx="7680960" cy="1097280"/>
           </a:xfrm>
           <a:prstGeom prst="rect">
@@ -2828,7 +2518,7 @@
               <a:buNone/>
             </a:pPr>
             <a:r>
-              <a:rPr lang="en-US" sz="3600" b="1" dirty="0">
+              <a:rPr lang="en-US" sz="3200" b="1" dirty="0">
                 <a:solidFill>
                   <a:srgbClr val="FFFFFF"/>
                 </a:solidFill>
@@ -2836,11 +2526,31 @@
                 <a:ea typeface="Georgia" pitchFamily="34" charset="-122"/>
                 <a:cs typeface="Georgia" pitchFamily="34" charset="-120"/>
               </a:rPr>
-              <a:t>Interdependence</a:t>
-            </a:r>
-            <a:endParaRPr lang="en-US" sz="3600" dirty="0"/>
-          </a:p>
-        </p:txBody>
+              <a:t>Interdependence &amp; Human Impact</a:t>
+            </a:r>
+            <a:endParaRPr lang="en-US" sz="3200" dirty="0"/>
+          </a:p>
+        </p:txBody>
+      </p:sp>
+      <p:sp>
+        <p:nvSpPr>
+          <p:cNvPr id="5" name="Shape 3"/>
+          <p:cNvSpPr/>
+          <p:nvPr/>
+        </p:nvSpPr>
+        <p:spPr>
+          <a:xfrm>
+            <a:off x="731520" y="3200400"/>
+            <a:ext cx="1828800" cy="54864"/>
+          </a:xfrm>
+          <a:prstGeom prst="rect">
+            <a:avLst/>
+          </a:prstGeom>
+          <a:solidFill>
+            <a:srgbClr val="E9C46A"/>
+          </a:solidFill>
+          <a:ln/>
+        </p:spPr>
       </p:sp>
     </p:spTree>
   </p:cSld>
@@ -2853,6 +2563,13 @@
 <file path=ppt/slides/slide7.xml><?xml version="1.0" encoding="utf-8"?>
 <p:sld xmlns:a="http://schemas.openxmlformats.org/drawingml/2006/main" xmlns:r="http://schemas.openxmlformats.org/officeDocument/2006/relationships" xmlns:p="http://schemas.openxmlformats.org/presentationml/2006/main">
   <p:cSld name="Slide 7">
+    <p:bg>
+      <p:bgPr>
+        <a:solidFill>
+          <a:srgbClr val="FAF8F5"/>
+        </a:solidFill>
+      </p:bgPr>
+    </p:bg>
     <p:spTree>
       <p:nvGrpSpPr>
         <p:cNvPr id="1" name=""/>
@@ -2876,13 +2593,13 @@
         <p:spPr>
           <a:xfrm>
             <a:off x="0" y="0"/>
-            <a:ext cx="9144000" cy="5143500"/>
-          </a:xfrm>
-          <a:prstGeom prst="rect">
-            <a:avLst/>
-          </a:prstGeom>
-          <a:solidFill>
-            <a:srgbClr val="FAF8F5"/>
+            <a:ext cx="9144000" cy="822960"/>
+          </a:xfrm>
+          <a:prstGeom prst="rect">
+            <a:avLst/>
+          </a:prstGeom>
+          <a:solidFill>
+            <a:srgbClr val="FFFFFF"/>
           </a:solidFill>
           <a:ln/>
         </p:spPr>
@@ -2895,14 +2612,14 @@
         </p:nvSpPr>
         <p:spPr>
           <a:xfrm>
-            <a:off x="0" y="0"/>
-            <a:ext cx="9144000" cy="54864"/>
-          </a:xfrm>
-          <a:prstGeom prst="rect">
-            <a:avLst/>
-          </a:prstGeom>
-          <a:solidFill>
-            <a:srgbClr val="1B2A4A"/>
+            <a:off x="0" y="795528"/>
+            <a:ext cx="9144000" cy="27432"/>
+          </a:xfrm>
+          <a:prstGeom prst="rect">
+            <a:avLst/>
+          </a:prstGeom>
+          <a:solidFill>
+            <a:srgbClr val="E9C46A"/>
           </a:solidFill>
           <a:ln/>
         </p:spPr>
@@ -2915,7 +2632,7 @@
         </p:nvSpPr>
         <p:spPr>
           <a:xfrm>
-            <a:off x="640080" y="320040"/>
+            <a:off x="640080" y="91440"/>
             <a:ext cx="7863840" cy="640080"/>
           </a:xfrm>
           <a:prstGeom prst="rect">
@@ -2932,7 +2649,7 @@
               <a:buNone/>
             </a:pPr>
             <a:r>
-              <a:rPr lang="en-US" sz="2600" b="1" dirty="0">
+              <a:rPr lang="en-US" sz="2200" b="1" dirty="0">
                 <a:solidFill>
                   <a:srgbClr val="1B2A4A"/>
                 </a:solidFill>
@@ -2940,9 +2657,9 @@
                 <a:ea typeface="Georgia" pitchFamily="34" charset="-122"/>
                 <a:cs typeface="Georgia" pitchFamily="34" charset="-120"/>
               </a:rPr>
-              <a:t>Relationships</a:t>
-            </a:r>
-            <a:endParaRPr lang="en-US" sz="2600" dirty="0"/>
+              <a:t>Big Picture Recap</a:t>
+            </a:r>
+            <a:endParaRPr lang="en-US" sz="2200" dirty="0"/>
           </a:p>
         </p:txBody>
       </p:sp>
@@ -2954,8 +2671,8 @@
         </p:nvSpPr>
         <p:spPr>
           <a:xfrm>
-            <a:off x="640080" y="1188720"/>
-            <a:ext cx="7863840" cy="3200400"/>
+            <a:off x="640080" y="1005840"/>
+            <a:ext cx="7863840" cy="2926080"/>
           </a:xfrm>
           <a:prstGeom prst="rect">
             <a:avLst/>
@@ -2964,18 +2681,18 @@
           <a:ln/>
         </p:spPr>
         <p:txBody>
-          <a:bodyPr wrap="square" rtlCol="0" anchor="t"/>
+          <a:bodyPr wrap="square" rtlCol="0" anchor="ctr"/>
           <a:lstStyle/>
           <a:p>
             <a:pPr marL="342900" indent="-342900">
-              <a:lnSpc>
-                <a:spcPct val="140000"/>
-              </a:lnSpc>
+              <a:spcAft>
+                <a:spcPts val="800"/>
+              </a:spcAft>
               <a:buSzPct val="100000"/>
               <a:buChar char="•"/>
             </a:pPr>
             <a:r>
-              <a:rPr lang="en-US" sz="1500" dirty="0">
+              <a:rPr lang="en-US" sz="1600" dirty="0">
                 <a:solidFill>
                   <a:srgbClr val="3D3A36"/>
                 </a:solidFill>
@@ -2983,20 +2700,20 @@
                 <a:ea typeface="Calibri" pitchFamily="34" charset="-122"/>
                 <a:cs typeface="Calibri" pitchFamily="34" charset="-120"/>
               </a:rPr>
-              <a:t>Mutualism: both benefit.</a:t>
-            </a:r>
-            <a:endParaRPr lang="en-US" sz="1500" dirty="0"/>
+              <a:t>Mutualism, parasitism, competition.</a:t>
+            </a:r>
+            <a:endParaRPr lang="en-US" sz="1600" dirty="0"/>
           </a:p>
           <a:p>
             <a:pPr marL="342900" indent="-342900">
-              <a:lnSpc>
-                <a:spcPct val="140000"/>
-              </a:lnSpc>
+              <a:spcAft>
+                <a:spcPts val="800"/>
+              </a:spcAft>
               <a:buSzPct val="100000"/>
               <a:buChar char="•"/>
             </a:pPr>
             <a:r>
-              <a:rPr lang="en-US" sz="1500" dirty="0">
+              <a:rPr lang="en-US" sz="1600" dirty="0">
                 <a:solidFill>
                   <a:srgbClr val="3D3A36"/>
                 </a:solidFill>
@@ -3004,20 +2721,20 @@
                 <a:ea typeface="Calibri" pitchFamily="34" charset="-122"/>
                 <a:cs typeface="Calibri" pitchFamily="34" charset="-120"/>
               </a:rPr>
-              <a:t>Commensalism: one benefits, other unaffected.</a:t>
-            </a:r>
-            <a:endParaRPr lang="en-US" sz="1500" dirty="0"/>
+              <a:t>Trophic cascades: one change ripples through the web.</a:t>
+            </a:r>
+            <a:endParaRPr lang="en-US" sz="1600" dirty="0"/>
           </a:p>
           <a:p>
             <a:pPr marL="342900" indent="-342900">
-              <a:lnSpc>
-                <a:spcPct val="140000"/>
-              </a:lnSpc>
+              <a:spcAft>
+                <a:spcPts val="800"/>
+              </a:spcAft>
               <a:buSzPct val="100000"/>
               <a:buChar char="•"/>
             </a:pPr>
             <a:r>
-              <a:rPr lang="en-US" sz="1500" dirty="0">
+              <a:rPr lang="en-US" sz="1600" dirty="0">
                 <a:solidFill>
                   <a:srgbClr val="3D3A36"/>
                 </a:solidFill>
@@ -3025,20 +2742,20 @@
                 <a:ea typeface="Calibri" pitchFamily="34" charset="-122"/>
                 <a:cs typeface="Calibri" pitchFamily="34" charset="-120"/>
               </a:rPr>
-              <a:t>Parasitism: one benefits at other's expense.</a:t>
-            </a:r>
-            <a:endParaRPr lang="en-US" sz="1500" dirty="0"/>
+              <a:t>Human impact: deforestation, pollution, overfishing, climate change.</a:t>
+            </a:r>
+            <a:endParaRPr lang="en-US" sz="1600" dirty="0"/>
           </a:p>
           <a:p>
             <a:pPr marL="342900" indent="-342900">
-              <a:lnSpc>
-                <a:spcPct val="140000"/>
-              </a:lnSpc>
+              <a:spcAft>
+                <a:spcPts val="800"/>
+              </a:spcAft>
               <a:buSzPct val="100000"/>
               <a:buChar char="•"/>
             </a:pPr>
             <a:r>
-              <a:rPr lang="en-US" sz="1500" dirty="0">
+              <a:rPr lang="en-US" sz="1600" dirty="0">
                 <a:solidFill>
                   <a:srgbClr val="3D3A36"/>
                 </a:solidFill>
@@ -3046,9 +2763,30 @@
                 <a:ea typeface="Calibri" pitchFamily="34" charset="-122"/>
                 <a:cs typeface="Calibri" pitchFamily="34" charset="-120"/>
               </a:rPr>
-              <a:t>Interdependence: all organisms depend on each other.</a:t>
-            </a:r>
-            <a:endParaRPr lang="en-US" sz="1500" dirty="0"/>
+              <a:t>Solutions: Yangtze ban, panda conservation, Germany's Energiewende.</a:t>
+            </a:r>
+            <a:endParaRPr lang="en-US" sz="1600" dirty="0"/>
+          </a:p>
+          <a:p>
+            <a:pPr marL="342900" indent="-342900">
+              <a:spcAft>
+                <a:spcPts val="800"/>
+              </a:spcAft>
+              <a:buSzPct val="100000"/>
+              <a:buChar char="•"/>
+            </a:pPr>
+            <a:r>
+              <a:rPr lang="en-US" sz="1600" dirty="0">
+                <a:solidFill>
+                  <a:srgbClr val="3D3A36"/>
+                </a:solidFill>
+                <a:latin typeface="Calibri" pitchFamily="34" charset="0"/>
+                <a:ea typeface="Calibri" pitchFamily="34" charset="-122"/>
+                <a:cs typeface="Calibri" pitchFamily="34" charset="-120"/>
+              </a:rPr>
+              <a:t>Key Concept: SYSTEMS — everything is connected.</a:t>
+            </a:r>
+            <a:endParaRPr lang="en-US" sz="1600" dirty="0"/>
           </a:p>
         </p:txBody>
       </p:sp>
@@ -3092,21 +2830,41 @@
             <a:avLst/>
           </a:prstGeom>
           <a:solidFill>
-            <a:srgbClr val="111D35"/>
-          </a:solidFill>
-          <a:ln/>
-        </p:spPr>
-      </p:sp>
-      <p:sp>
-        <p:nvSpPr>
-          <p:cNvPr id="3" name="Text 1"/>
-          <p:cNvSpPr/>
-          <p:nvPr/>
-        </p:nvSpPr>
-        <p:spPr>
-          <a:xfrm>
-            <a:off x="731520" y="914400"/>
-            <a:ext cx="2743200" cy="1371600"/>
+            <a:srgbClr val="1B2A4A"/>
+          </a:solidFill>
+          <a:ln/>
+        </p:spPr>
+      </p:sp>
+      <p:sp>
+        <p:nvSpPr>
+          <p:cNvPr id="3" name="Shape 1"/>
+          <p:cNvSpPr/>
+          <p:nvPr/>
+        </p:nvSpPr>
+        <p:spPr>
+          <a:xfrm>
+            <a:off x="0" y="4777740"/>
+            <a:ext cx="9144000" cy="365760"/>
+          </a:xfrm>
+          <a:prstGeom prst="rect">
+            <a:avLst/>
+          </a:prstGeom>
+          <a:solidFill>
+            <a:srgbClr val="E9C46A"/>
+          </a:solidFill>
+          <a:ln/>
+        </p:spPr>
+      </p:sp>
+      <p:sp>
+        <p:nvSpPr>
+          <p:cNvPr id="4" name="Text 2"/>
+          <p:cNvSpPr/>
+          <p:nvPr/>
+        </p:nvSpPr>
+        <p:spPr>
+          <a:xfrm>
+            <a:off x="731520" y="1371600"/>
+            <a:ext cx="7680960" cy="914400"/>
           </a:xfrm>
           <a:prstGeom prst="rect">
             <a:avLst/>
@@ -3118,48 +2876,7 @@
           <a:bodyPr wrap="square" rtlCol="0" anchor="ctr"/>
           <a:lstStyle/>
           <a:p>
-            <a:pPr indent="0" marL="0">
-              <a:buNone/>
-            </a:pPr>
-            <a:r>
-              <a:rPr lang="en-US" sz="7200" b="1" dirty="0">
-                <a:solidFill>
-                  <a:srgbClr val="1B2A4A">
-                    <a:alpha val="70000"/>
-                  </a:srgbClr>
-                </a:solidFill>
-                <a:latin typeface="Georgia" pitchFamily="34" charset="0"/>
-                <a:ea typeface="Georgia" pitchFamily="34" charset="-122"/>
-                <a:cs typeface="Georgia" pitchFamily="34" charset="-120"/>
-              </a:rPr>
-              <a:t>04</a:t>
-            </a:r>
-            <a:endParaRPr lang="en-US" sz="7200" dirty="0"/>
-          </a:p>
-        </p:txBody>
-      </p:sp>
-      <p:sp>
-        <p:nvSpPr>
-          <p:cNvPr id="4" name="Text 2"/>
-          <p:cNvSpPr/>
-          <p:nvPr/>
-        </p:nvSpPr>
-        <p:spPr>
-          <a:xfrm>
-            <a:off x="731520" y="2286000"/>
-            <a:ext cx="7680960" cy="1097280"/>
-          </a:xfrm>
-          <a:prstGeom prst="rect">
-            <a:avLst/>
-          </a:prstGeom>
-          <a:noFill/>
-          <a:ln/>
-        </p:spPr>
-        <p:txBody>
-          <a:bodyPr wrap="square" rtlCol="0" anchor="ctr"/>
-          <a:lstStyle/>
-          <a:p>
-            <a:pPr indent="0" marL="0">
+            <a:pPr algn="ctr" indent="0" marL="0">
               <a:buNone/>
             </a:pPr>
             <a:r>
@@ -3171,87 +2888,22 @@
                 <a:ea typeface="Georgia" pitchFamily="34" charset="-122"/>
                 <a:cs typeface="Georgia" pitchFamily="34" charset="-120"/>
               </a:rPr>
-              <a:t>Human Impact</a:t>
+              <a:t>Review &amp; Practise</a:t>
             </a:r>
             <a:endParaRPr lang="en-US" sz="3600" dirty="0"/>
           </a:p>
         </p:txBody>
       </p:sp>
-    </p:spTree>
-  </p:cSld>
-  <p:clrMapOvr>
-    <a:masterClrMapping/>
-  </p:clrMapOvr>
-</p:sld>
-</file>
-
-<file path=ppt/slides/slide9.xml><?xml version="1.0" encoding="utf-8"?>
-<p:sld xmlns:a="http://schemas.openxmlformats.org/drawingml/2006/main" xmlns:r="http://schemas.openxmlformats.org/officeDocument/2006/relationships" xmlns:p="http://schemas.openxmlformats.org/presentationml/2006/main">
-  <p:cSld name="Slide 9">
-    <p:spTree>
-      <p:nvGrpSpPr>
-        <p:cNvPr id="1" name=""/>
-        <p:cNvGrpSpPr/>
-        <p:nvPr/>
-      </p:nvGrpSpPr>
-      <p:grpSpPr>
-        <a:xfrm>
-          <a:off x="0" y="0"/>
-          <a:ext cx="0" cy="0"/>
-          <a:chOff x="0" y="0"/>
-          <a:chExt cx="0" cy="0"/>
-        </a:xfrm>
-      </p:grpSpPr>
-      <p:sp>
-        <p:nvSpPr>
-          <p:cNvPr id="2" name="Shape 0"/>
-          <p:cNvSpPr/>
-          <p:nvPr/>
-        </p:nvSpPr>
-        <p:spPr>
-          <a:xfrm>
-            <a:off x="0" y="0"/>
-            <a:ext cx="9144000" cy="5143500"/>
-          </a:xfrm>
-          <a:prstGeom prst="rect">
-            <a:avLst/>
-          </a:prstGeom>
-          <a:solidFill>
-            <a:srgbClr val="FAF8F5"/>
-          </a:solidFill>
-          <a:ln/>
-        </p:spPr>
-      </p:sp>
-      <p:sp>
-        <p:nvSpPr>
-          <p:cNvPr id="3" name="Shape 1"/>
-          <p:cNvSpPr/>
-          <p:nvPr/>
-        </p:nvSpPr>
-        <p:spPr>
-          <a:xfrm>
-            <a:off x="0" y="0"/>
-            <a:ext cx="9144000" cy="54864"/>
-          </a:xfrm>
-          <a:prstGeom prst="rect">
-            <a:avLst/>
-          </a:prstGeom>
-          <a:solidFill>
-            <a:srgbClr val="1B2A4A"/>
-          </a:solidFill>
-          <a:ln/>
-        </p:spPr>
-      </p:sp>
-      <p:sp>
-        <p:nvSpPr>
-          <p:cNvPr id="4" name="Text 2"/>
-          <p:cNvSpPr/>
-          <p:nvPr/>
-        </p:nvSpPr>
-        <p:spPr>
-          <a:xfrm>
-            <a:off x="640080" y="320040"/>
-            <a:ext cx="7863840" cy="640080"/>
+      <p:sp>
+        <p:nvSpPr>
+          <p:cNvPr id="5" name="Text 3"/>
+          <p:cNvSpPr/>
+          <p:nvPr/>
+        </p:nvSpPr>
+        <p:spPr>
+          <a:xfrm>
+            <a:off x="731520" y="2560320"/>
+            <a:ext cx="7680960" cy="548640"/>
           </a:xfrm>
           <a:prstGeom prst="rect">
             <a:avLst/>
@@ -3260,130 +2912,24 @@
           <a:ln/>
         </p:spPr>
         <p:txBody>
-          <a:bodyPr wrap="square" lIns="0" tIns="0" rIns="0" bIns="0" rtlCol="0" anchor="ctr"/>
-          <a:lstStyle/>
-          <a:p>
-            <a:pPr indent="0" marL="0">
+          <a:bodyPr wrap="square" rtlCol="0" anchor="ctr"/>
+          <a:lstStyle/>
+          <a:p>
+            <a:pPr algn="ctr" indent="0" marL="0">
               <a:buNone/>
             </a:pPr>
             <a:r>
-              <a:rPr lang="en-US" sz="2600" b="1" dirty="0">
+              <a:rPr lang="en-US" sz="2000" dirty="0">
                 <a:solidFill>
-                  <a:srgbClr val="1B2A4A"/>
-                </a:solidFill>
-                <a:latin typeface="Georgia" pitchFamily="34" charset="0"/>
-                <a:ea typeface="Georgia" pitchFamily="34" charset="-122"/>
-                <a:cs typeface="Georgia" pitchFamily="34" charset="-120"/>
-              </a:rPr>
-              <a:t>Threats &amp; Conservation</a:t>
-            </a:r>
-            <a:endParaRPr lang="en-US" sz="2600" dirty="0"/>
-          </a:p>
-        </p:txBody>
-      </p:sp>
-      <p:sp>
-        <p:nvSpPr>
-          <p:cNvPr id="5" name="Text 3"/>
-          <p:cNvSpPr/>
-          <p:nvPr/>
-        </p:nvSpPr>
-        <p:spPr>
-          <a:xfrm>
-            <a:off x="640080" y="1188720"/>
-            <a:ext cx="7863840" cy="3200400"/>
-          </a:xfrm>
-          <a:prstGeom prst="rect">
-            <a:avLst/>
-          </a:prstGeom>
-          <a:noFill/>
-          <a:ln/>
-        </p:spPr>
-        <p:txBody>
-          <a:bodyPr wrap="square" rtlCol="0" anchor="t"/>
-          <a:lstStyle/>
-          <a:p>
-            <a:pPr marL="342900" indent="-342900">
-              <a:lnSpc>
-                <a:spcPct val="140000"/>
-              </a:lnSpc>
-              <a:buSzPct val="100000"/>
-              <a:buChar char="•"/>
-            </a:pPr>
-            <a:r>
-              <a:rPr lang="en-US" sz="1500" dirty="0">
-                <a:solidFill>
-                  <a:srgbClr val="3D3A36"/>
+                  <a:srgbClr val="E9C46A"/>
                 </a:solidFill>
                 <a:latin typeface="Calibri" pitchFamily="34" charset="0"/>
                 <a:ea typeface="Calibri" pitchFamily="34" charset="-122"/>
                 <a:cs typeface="Calibri" pitchFamily="34" charset="-120"/>
               </a:rPr>
-              <a:t>Trophic cascades: removing species has chain effects.</a:t>
-            </a:r>
-            <a:endParaRPr lang="en-US" sz="1500" dirty="0"/>
-          </a:p>
-          <a:p>
-            <a:pPr marL="342900" indent="-342900">
-              <a:lnSpc>
-                <a:spcPct val="140000"/>
-              </a:lnSpc>
-              <a:buSzPct val="100000"/>
-              <a:buChar char="•"/>
-            </a:pPr>
-            <a:r>
-              <a:rPr lang="en-US" sz="1500" dirty="0">
-                <a:solidFill>
-                  <a:srgbClr val="3D3A36"/>
-                </a:solidFill>
-                <a:latin typeface="Calibri" pitchFamily="34" charset="0"/>
-                <a:ea typeface="Calibri" pitchFamily="34" charset="-122"/>
-                <a:cs typeface="Calibri" pitchFamily="34" charset="-120"/>
-              </a:rPr>
-              <a:t>Threats: deforestation, pollution, overfishing, invasive species.</a:t>
-            </a:r>
-            <a:endParaRPr lang="en-US" sz="1500" dirty="0"/>
-          </a:p>
-          <a:p>
-            <a:pPr marL="342900" indent="-342900">
-              <a:lnSpc>
-                <a:spcPct val="140000"/>
-              </a:lnSpc>
-              <a:buSzPct val="100000"/>
-              <a:buChar char="•"/>
-            </a:pPr>
-            <a:r>
-              <a:rPr lang="en-US" sz="1500" dirty="0">
-                <a:solidFill>
-                  <a:srgbClr val="3D3A36"/>
-                </a:solidFill>
-                <a:latin typeface="Calibri" pitchFamily="34" charset="0"/>
-                <a:ea typeface="Calibri" pitchFamily="34" charset="-122"/>
-                <a:cs typeface="Calibri" pitchFamily="34" charset="-120"/>
-              </a:rPr>
-              <a:t>Key concept: SYSTEMS — every part is connected.</a:t>
-            </a:r>
-            <a:endParaRPr lang="en-US" sz="1500" dirty="0"/>
-          </a:p>
-          <a:p>
-            <a:pPr marL="342900" indent="-342900">
-              <a:lnSpc>
-                <a:spcPct val="140000"/>
-              </a:lnSpc>
-              <a:buSzPct val="100000"/>
-              <a:buChar char="•"/>
-            </a:pPr>
-            <a:r>
-              <a:rPr lang="en-US" sz="1500" dirty="0">
-                <a:solidFill>
-                  <a:srgbClr val="3D3A36"/>
-                </a:solidFill>
-                <a:latin typeface="Calibri" pitchFamily="34" charset="0"/>
-                <a:ea typeface="Calibri" pitchFamily="34" charset="-122"/>
-                <a:cs typeface="Calibri" pitchFamily="34" charset="-120"/>
-              </a:rPr>
-              <a:t>Yellowstone wolves = classic trophic cascade example.</a:t>
-            </a:r>
-            <a:endParaRPr lang="en-US" sz="1500" dirty="0"/>
+              <a:t>mrzocchi.com</a:t>
+            </a:r>
+            <a:endParaRPr lang="en-US" sz="2000" dirty="0"/>
           </a:p>
         </p:txBody>
       </p:sp>
